--- a/docs/lecture_slides/Week 2/Week2_Lecture4_slides_1_19_2024.pptx
+++ b/docs/lecture_slides/Week 2/Week2_Lecture4_slides_1_19_2024.pptx
@@ -3803,6 +3803,45 @@
           </a:extLst>
         </p:spPr>
       </p:pic>
+      <p:sp>
+        <p:nvSpPr>
+          <p:cNvPr id="4" name="Dataset note">
+            <a:extLst>
+              <a:ext uri="{FF2B5EF4-FFF2-40B4-BE49-F238E27FC236}">
+                <a16:creationId xmlns:a16="http://schemas.microsoft.com/office/drawing/2014/main" id="{1F2F0356-28C4-0A6D-B88E-3707F5009C99}"/>
+              </a:ext>
+            </a:extLst>
+          </p:cNvPr>
+          <p:cNvSpPr txBox="1"/>
+          <p:nvPr/>
+        </p:nvSpPr>
+        <p:spPr>
+          <a:xfrm>
+            <a:off x="266700" y="6096000"/>
+            <a:ext cx="11798300" cy="646331"/>
+          </a:xfrm>
+          <a:prstGeom prst="rect">
+            <a:avLst/>
+          </a:prstGeom>
+          <a:noFill/>
+        </p:spPr>
+        <p:txBody>
+          <a:bodyPr vert="horz" wrap="square" rtlCol="0">
+            <a:spAutoFit/>
+          </a:bodyPr>
+          <a:lstStyle/>
+          <a:p>
+            <a:r>
+              <a:rPr lang="en-US" sz="1200" b="1"/>
+              <a:t>About the data:</a:t>
+            </a:r>
+            <a:r>
+              <a:rPr lang="en-US" sz="1200"/>
+              <a:t> mtcars – road-test figures for 32 cars from the 1974 Motor Trend US magazine (1973–74 models), one row per car. We use two of its 11 variables: mpg (miles per US gallon, ranging 10.4 to 33.9) and cyl, the number of engine cylinders – 4, 6 or 8, with 11, 7 and 14 cars in each group. Cylinder count is a grouping variable, which is what lets the dot plot on the next slide compare three groups side by side.</a:t>
+            </a:r>
+          </a:p>
+        </p:txBody>
+      </p:sp>
     </p:spTree>
     <p:extLst>
       <p:ext uri="{BB962C8B-B14F-4D97-AF65-F5344CB8AC3E}">

--- a/docs/lecture_slides/Week 2/Week2_Lecture4_slides_1_19_2024.pptx
+++ b/docs/lecture_slides/Week 2/Week2_Lecture4_slides_1_19_2024.pptx
@@ -27,20 +27,19 @@
     <p:sldId id="328" r:id="rId21"/>
     <p:sldId id="332" r:id="rId22"/>
     <p:sldId id="295" r:id="rId23"/>
-    <p:sldId id="294" r:id="rId24"/>
-    <p:sldId id="338" r:id="rId25"/>
-    <p:sldId id="341" r:id="rId26"/>
-    <p:sldId id="304" r:id="rId27"/>
-    <p:sldId id="330" r:id="rId28"/>
-    <p:sldId id="307" r:id="rId29"/>
-    <p:sldId id="342" r:id="rId30"/>
-    <p:sldId id="305" r:id="rId31"/>
-    <p:sldId id="343" r:id="rId32"/>
-    <p:sldId id="344" r:id="rId33"/>
-    <p:sldId id="345" r:id="rId34"/>
-    <p:sldId id="346" r:id="rId35"/>
-    <p:sldId id="309" r:id="rId36"/>
-    <p:sldId id="308" r:id="rId37"/>
+    <p:sldId id="338" r:id="rId24"/>
+    <p:sldId id="341" r:id="rId25"/>
+    <p:sldId id="304" r:id="rId26"/>
+    <p:sldId id="330" r:id="rId27"/>
+    <p:sldId id="307" r:id="rId28"/>
+    <p:sldId id="342" r:id="rId29"/>
+    <p:sldId id="305" r:id="rId30"/>
+    <p:sldId id="343" r:id="rId31"/>
+    <p:sldId id="344" r:id="rId32"/>
+    <p:sldId id="345" r:id="rId33"/>
+    <p:sldId id="346" r:id="rId34"/>
+    <p:sldId id="309" r:id="rId35"/>
+    <p:sldId id="308" r:id="rId36"/>
   </p:sldIdLst>
   <p:sldSz cx="12192000" cy="6858000"/>
   <p:notesSz cx="6858000" cy="9144000"/>
@@ -9351,102 +9350,12 @@
           <a:chExt cx="0" cy="0"/>
         </a:xfrm>
       </p:grpSpPr>
-      <p:pic>
-        <p:nvPicPr>
-          <p:cNvPr id="4" name="Picture 3" descr="Frequency table of Old Faithful waiting times in ten-minute bins with frequency, relative frequency and cumulative relative frequency.">
-            <a:extLst>
-              <a:ext uri="{FF2B5EF4-FFF2-40B4-BE49-F238E27FC236}">
-                <a16:creationId xmlns:a16="http://schemas.microsoft.com/office/drawing/2014/main" id="{43F76311-3A9D-2395-F921-58D84AC2F9B4}"/>
-              </a:ext>
-            </a:extLst>
-          </p:cNvPr>
-          <p:cNvPicPr>
-            <a:picLocks noChangeAspect="1"/>
-          </p:cNvPicPr>
-          <p:nvPr/>
-        </p:nvPicPr>
-        <p:blipFill>
-          <a:blip r:embed="rId2"/>
-          <a:stretch>
-            <a:fillRect/>
-          </a:stretch>
-        </p:blipFill>
-        <p:spPr>
-          <a:xfrm>
-            <a:off x="406043" y="2371724"/>
-            <a:ext cx="5299432" cy="2512843"/>
-          </a:xfrm>
-          <a:prstGeom prst="rect">
-            <a:avLst/>
-          </a:prstGeom>
-        </p:spPr>
-      </p:pic>
-      <p:pic>
-        <p:nvPicPr>
-          <p:cNvPr id="10" name="Picture 9" descr="Histogram of Old Faithful waiting times in ten-minute bins, frequency on the vertical axis, showing two peaks either side of a dip near 65 minutes.">
-            <a:extLst>
-              <a:ext uri="{FF2B5EF4-FFF2-40B4-BE49-F238E27FC236}">
-                <a16:creationId xmlns:a16="http://schemas.microsoft.com/office/drawing/2014/main" id="{9AC59B7A-4888-2F53-4913-9DA0E60378A7}"/>
-              </a:ext>
-            </a:extLst>
-          </p:cNvPr>
-          <p:cNvPicPr>
-            <a:picLocks noChangeAspect="1"/>
-          </p:cNvPicPr>
-          <p:nvPr/>
-        </p:nvPicPr>
-        <p:blipFill>
-          <a:blip r:embed="rId3"/>
-          <a:stretch>
-            <a:fillRect/>
-          </a:stretch>
-        </p:blipFill>
-        <p:spPr>
-          <a:xfrm>
-            <a:off x="6096000" y="3428176"/>
-            <a:ext cx="5972175" cy="3429824"/>
-          </a:xfrm>
-          <a:prstGeom prst="rect">
-            <a:avLst/>
-          </a:prstGeom>
-        </p:spPr>
-      </p:pic>
-      <p:pic>
-        <p:nvPicPr>
-          <p:cNvPr id="8" name="Picture 7" descr="The same histogram with relative frequency on the vertical axis; the shape is identical, only the scale changes.">
-            <a:extLst>
-              <a:ext uri="{FF2B5EF4-FFF2-40B4-BE49-F238E27FC236}">
-                <a16:creationId xmlns:a16="http://schemas.microsoft.com/office/drawing/2014/main" id="{978CA529-7CC3-CAE2-9847-392C83BDC9D6}"/>
-              </a:ext>
-            </a:extLst>
-          </p:cNvPr>
-          <p:cNvPicPr>
-            <a:picLocks noChangeAspect="1"/>
-          </p:cNvPicPr>
-          <p:nvPr/>
-        </p:nvPicPr>
-        <p:blipFill>
-          <a:blip r:embed="rId4"/>
-          <a:stretch>
-            <a:fillRect/>
-          </a:stretch>
-        </p:blipFill>
-        <p:spPr>
-          <a:xfrm>
-            <a:off x="5920644" y="171451"/>
-            <a:ext cx="6271356" cy="3790950"/>
-          </a:xfrm>
-          <a:prstGeom prst="rect">
-            <a:avLst/>
-          </a:prstGeom>
-        </p:spPr>
-      </p:pic>
       <p:sp>
         <p:nvSpPr>
-          <p:cNvPr id="11" name="Title 1">
+          <p:cNvPr id="2" name="Title 1">
             <a:extLst>
               <a:ext uri="{FF2B5EF4-FFF2-40B4-BE49-F238E27FC236}">
-                <a16:creationId xmlns:a16="http://schemas.microsoft.com/office/drawing/2014/main" id="{4A4E0D4A-62CF-AB62-D6A7-48E60442E41C}"/>
+                <a16:creationId xmlns:a16="http://schemas.microsoft.com/office/drawing/2014/main" id="{8CBF7785-FEE9-FCDE-BE15-9C090217399B}"/>
               </a:ext>
             </a:extLst>
           </p:cNvPr>
@@ -9457,12 +9366,35 @@
             <p:ph type="title"/>
           </p:nvPr>
         </p:nvSpPr>
-        <p:spPr>
-          <a:xfrm>
-            <a:off x="560209" y="1546224"/>
-            <a:ext cx="4991100" cy="825500"/>
-          </a:xfrm>
-        </p:spPr>
+        <p:spPr/>
+        <p:txBody>
+          <a:bodyPr/>
+          <a:lstStyle/>
+          <a:p>
+            <a:r>
+              <a:rPr lang="en-US"/>
+              <a:t>Histogram: strengths and weaknesses</a:t>
+            </a:r>
+          </a:p>
+        </p:txBody>
+      </p:sp>
+      <p:sp>
+        <p:nvSpPr>
+          <p:cNvPr id="3" name="Content Placeholder 2">
+            <a:extLst>
+              <a:ext uri="{FF2B5EF4-FFF2-40B4-BE49-F238E27FC236}">
+                <a16:creationId xmlns:a16="http://schemas.microsoft.com/office/drawing/2014/main" id="{BF09BD64-F37A-6B24-63CE-8584D3FBB326}"/>
+              </a:ext>
+            </a:extLst>
+          </p:cNvPr>
+          <p:cNvSpPr>
+            <a:spLocks noGrp="1"/>
+          </p:cNvSpPr>
+          <p:nvPr>
+            <p:ph idx="1"/>
+          </p:nvPr>
+        </p:nvSpPr>
+        <p:spPr/>
         <p:txBody>
           <a:bodyPr>
             <a:normAutofit/>
@@ -9470,8 +9402,64 @@
           <a:lstStyle/>
           <a:p>
             <a:r>
-              <a:rPr lang="en-US" sz="2400" dirty="0"/>
-              <a:t>Example: Old Faithful Eruption Times</a:t>
+              <a:rPr lang="en-US" b="1">
+                <a:solidFill>
+                  <a:srgbClr val="1F7A4D"/>
+                </a:solidFill>
+              </a:rPr>
+              <a:t>Strengths</a:t>
+            </a:r>
+          </a:p>
+          <a:p>
+            <a:pPr lvl="1"/>
+            <a:r>
+              <a:rPr lang="en-US"/>
+              <a:t>A great way to get an idea of shape when the sample is medium or large (n &gt; 20)</a:t>
+            </a:r>
+          </a:p>
+          <a:p>
+            <a:pPr lvl="1"/>
+            <a:r>
+              <a:rPr lang="en-US"/>
+              <a:t>Handles continuous data at any sample size, and stays readable as n grows</a:t>
+            </a:r>
+          </a:p>
+          <a:p>
+            <a:pPr lvl="1"/>
+            <a:r>
+              <a:rPr lang="en-US"/>
+              <a:t>The standard choice for showing a distribution to someone else</a:t>
+            </a:r>
+          </a:p>
+          <a:p>
+            <a:r>
+              <a:rPr lang="en-US" b="1">
+                <a:solidFill>
+                  <a:srgbClr val="C00000"/>
+                </a:solidFill>
+              </a:rPr>
+              <a:t>Weaknesses</a:t>
+            </a:r>
+          </a:p>
+          <a:p>
+            <a:pPr lvl="1"/>
+            <a:r>
+              <a:rPr lang="en-US"/>
+              <a:t>Hides the individual observations: you see bars, not data points</a:t>
+            </a:r>
+          </a:p>
+          <a:p>
+            <a:pPr lvl="1"/>
+            <a:r>
+              <a:rPr lang="en-US"/>
+              <a:t>The shape depends on the number of bins, so it can distort shape for small samples</a:t>
+            </a:r>
+          </a:p>
+          <a:p>
+            <a:pPr lvl="1"/>
+            <a:r>
+              <a:rPr lang="en-US"/>
+              <a:t>Bin edges are arbitrary, and moving them can change the story the picture tells</a:t>
             </a:r>
           </a:p>
         </p:txBody>
@@ -9479,7 +9467,7 @@
     </p:spTree>
     <p:extLst>
       <p:ext uri="{BB962C8B-B14F-4D97-AF65-F5344CB8AC3E}">
-        <p14:creationId xmlns:p14="http://schemas.microsoft.com/office/powerpoint/2010/main" val="726230392"/>
+        <p14:creationId xmlns:p14="http://schemas.microsoft.com/office/powerpoint/2010/main" val="2725062704"/>
       </p:ext>
     </p:extLst>
   </p:cSld>
@@ -9511,7 +9499,7 @@
           <p:cNvPr id="2" name="Title 1">
             <a:extLst>
               <a:ext uri="{FF2B5EF4-FFF2-40B4-BE49-F238E27FC236}">
-                <a16:creationId xmlns:a16="http://schemas.microsoft.com/office/drawing/2014/main" id="{8CBF7785-FEE9-FCDE-BE15-9C090217399B}"/>
+                <a16:creationId xmlns:a16="http://schemas.microsoft.com/office/drawing/2014/main" id="{F75DF18B-03F1-B339-420D-B9726A8F58BE}"/>
               </a:ext>
             </a:extLst>
           </p:cNvPr>
@@ -9529,7 +9517,7 @@
           <a:p>
             <a:r>
               <a:rPr lang="en-US"/>
-              <a:t>Histogram: strengths and weaknesses</a:t>
+              <a:t>From pictures to numbers</a:t>
             </a:r>
           </a:p>
         </p:txBody>
@@ -9539,7 +9527,7 @@
           <p:cNvPr id="3" name="Content Placeholder 2">
             <a:extLst>
               <a:ext uri="{FF2B5EF4-FFF2-40B4-BE49-F238E27FC236}">
-                <a16:creationId xmlns:a16="http://schemas.microsoft.com/office/drawing/2014/main" id="{BF09BD64-F37A-6B24-63CE-8584D3FBB326}"/>
+                <a16:creationId xmlns:a16="http://schemas.microsoft.com/office/drawing/2014/main" id="{5363AFEC-517A-96A4-2E3F-C4B69D443121}"/>
               </a:ext>
             </a:extLst>
           </p:cNvPr>
@@ -9558,205 +9546,61 @@
           <a:lstStyle/>
           <a:p>
             <a:r>
-              <a:rPr lang="en-US" b="1">
-                <a:solidFill>
-                  <a:srgbClr val="1F7A4D"/>
-                </a:solidFill>
-              </a:rPr>
-              <a:t>Strengths</a:t>
-            </a:r>
-          </a:p>
-          <a:p>
-            <a:pPr lvl="1"/>
-            <a:r>
-              <a:rPr lang="en-US"/>
-              <a:t>A great way to get an idea of shape when the sample is medium or large (n &gt; 20)</a:t>
-            </a:r>
-          </a:p>
-          <a:p>
-            <a:pPr lvl="1"/>
-            <a:r>
-              <a:rPr lang="en-US"/>
-              <a:t>Handles continuous data at any sample size, and stays readable as n grows</a:t>
-            </a:r>
-          </a:p>
-          <a:p>
-            <a:pPr lvl="1"/>
-            <a:r>
-              <a:rPr lang="en-US"/>
-              <a:t>The standard choice for showing a distribution to someone else</a:t>
-            </a:r>
-          </a:p>
-          <a:p>
-            <a:r>
-              <a:rPr lang="en-US" b="1">
-                <a:solidFill>
-                  <a:srgbClr val="C00000"/>
-                </a:solidFill>
-              </a:rPr>
-              <a:t>Weaknesses</a:t>
-            </a:r>
-          </a:p>
-          <a:p>
-            <a:pPr lvl="1"/>
-            <a:r>
-              <a:rPr lang="en-US"/>
-              <a:t>Hides the individual observations: you see bars, not data points</a:t>
-            </a:r>
-          </a:p>
-          <a:p>
-            <a:pPr lvl="1"/>
-            <a:r>
-              <a:rPr lang="en-US"/>
-              <a:t>The shape depends on the number of bins, so it can distort shape for small samples</a:t>
-            </a:r>
-          </a:p>
-          <a:p>
-            <a:pPr lvl="1"/>
-            <a:r>
-              <a:rPr lang="en-US"/>
-              <a:t>Bin edges are arbitrary, and moving them can change the story the picture tells</a:t>
-            </a:r>
-          </a:p>
-        </p:txBody>
-      </p:sp>
-    </p:spTree>
-    <p:extLst>
-      <p:ext uri="{BB962C8B-B14F-4D97-AF65-F5344CB8AC3E}">
-        <p14:creationId xmlns:p14="http://schemas.microsoft.com/office/powerpoint/2010/main" val="2725062704"/>
-      </p:ext>
-    </p:extLst>
-  </p:cSld>
-  <p:clrMapOvr>
-    <a:masterClrMapping/>
-  </p:clrMapOvr>
-</p:sld>
-</file>
-
-<file path=ppt/slides/slide25.xml><?xml version="1.0" encoding="utf-8"?>
-<p:sld xmlns:a="http://schemas.openxmlformats.org/drawingml/2006/main" xmlns:r="http://schemas.openxmlformats.org/officeDocument/2006/relationships" xmlns:p="http://schemas.openxmlformats.org/presentationml/2006/main">
-  <p:cSld>
-    <p:spTree>
-      <p:nvGrpSpPr>
-        <p:cNvPr id="1" name=""/>
-        <p:cNvGrpSpPr/>
-        <p:nvPr/>
-      </p:nvGrpSpPr>
-      <p:grpSpPr>
-        <a:xfrm>
-          <a:off x="0" y="0"/>
-          <a:ext cx="0" cy="0"/>
-          <a:chOff x="0" y="0"/>
-          <a:chExt cx="0" cy="0"/>
-        </a:xfrm>
-      </p:grpSpPr>
-      <p:sp>
-        <p:nvSpPr>
-          <p:cNvPr id="2" name="Title 1">
-            <a:extLst>
-              <a:ext uri="{FF2B5EF4-FFF2-40B4-BE49-F238E27FC236}">
-                <a16:creationId xmlns:a16="http://schemas.microsoft.com/office/drawing/2014/main" id="{F75DF18B-03F1-B339-420D-B9726A8F58BE}"/>
-              </a:ext>
-            </a:extLst>
-          </p:cNvPr>
-          <p:cNvSpPr>
-            <a:spLocks noGrp="1"/>
-          </p:cNvSpPr>
-          <p:nvPr>
-            <p:ph type="title"/>
-          </p:nvPr>
-        </p:nvSpPr>
-        <p:spPr/>
-        <p:txBody>
-          <a:bodyPr/>
-          <a:lstStyle/>
-          <a:p>
-            <a:r>
-              <a:rPr lang="en-US"/>
-              <a:t>From pictures to numbers</a:t>
-            </a:r>
-          </a:p>
-        </p:txBody>
-      </p:sp>
-      <p:sp>
-        <p:nvSpPr>
-          <p:cNvPr id="3" name="Content Placeholder 2">
-            <a:extLst>
-              <a:ext uri="{FF2B5EF4-FFF2-40B4-BE49-F238E27FC236}">
-                <a16:creationId xmlns:a16="http://schemas.microsoft.com/office/drawing/2014/main" id="{5363AFEC-517A-96A4-2E3F-C4B69D443121}"/>
-              </a:ext>
-            </a:extLst>
-          </p:cNvPr>
-          <p:cNvSpPr>
-            <a:spLocks noGrp="1"/>
-          </p:cNvSpPr>
-          <p:nvPr>
-            <p:ph idx="1"/>
-          </p:nvPr>
-        </p:nvSpPr>
-        <p:spPr/>
-        <p:txBody>
-          <a:bodyPr>
-            <a:normAutofit/>
-          </a:bodyPr>
-          <a:lstStyle/>
-          <a:p>
-            <a:r>
-              <a:rPr lang="en-US" sz="1600" b="1"/>
+              <a:rPr lang="en-US" sz="2000" b="1" dirty="0"/>
               <a:t>Next: measures of location and position.</a:t>
             </a:r>
             <a:r>
-              <a:rPr lang="en-US" sz="1600"/>
+              <a:rPr lang="en-US" sz="2000" dirty="0"/>
               <a:t> Single numbers that say where a distribution sits.</a:t>
             </a:r>
           </a:p>
           <a:p>
             <a:r>
-              <a:rPr lang="en-US" sz="1600" b="1"/>
+              <a:rPr lang="en-US" sz="2000" b="1" dirty="0"/>
               <a:t>Numbers can be computed with.</a:t>
             </a:r>
             <a:r>
-              <a:rPr lang="en-US" sz="1600"/>
+              <a:rPr lang="en-US" sz="2000" dirty="0"/>
               <a:t> A graph is read by eye. A statistic goes into a table, a comparison, or a hypothesis test.</a:t>
             </a:r>
           </a:p>
           <a:p>
             <a:r>
-              <a:rPr lang="en-US" sz="1600" b="1"/>
+              <a:rPr lang="en-US" sz="2000" b="1" dirty="0"/>
               <a:t>"What is a typical value?"</a:t>
             </a:r>
             <a:r>
-              <a:rPr lang="en-US" sz="1600"/>
+              <a:rPr lang="en-US" sz="2000" dirty="0"/>
               <a:t> The first question anyone asks of a dataset, and the mean, median and mode each answer it differently.</a:t>
             </a:r>
           </a:p>
           <a:p>
             <a:r>
-              <a:rPr lang="en-US" sz="1600" b="1"/>
+              <a:rPr lang="en-US" sz="2000" b="1" dirty="0"/>
               <a:t>Comparing groups.</a:t>
             </a:r>
             <a:r>
-              <a:rPr lang="en-US" sz="1600"/>
+              <a:rPr lang="en-US" sz="2000" dirty="0"/>
               <a:t> Two samples are compared through their centers, not by squinting at two histograms.</a:t>
             </a:r>
           </a:p>
           <a:p>
             <a:r>
-              <a:rPr lang="en-US" sz="1600" b="1"/>
+              <a:rPr lang="en-US" sz="2000" b="1" dirty="0"/>
               <a:t>Where does one observation sit?</a:t>
             </a:r>
             <a:r>
-              <a:rPr lang="en-US" sz="1600"/>
+              <a:rPr lang="en-US" sz="2000" dirty="0"/>
               <a:t> A score of 78 means little until you know it falls at the 90th percentile.</a:t>
             </a:r>
           </a:p>
           <a:p>
             <a:r>
-              <a:rPr lang="en-US" sz="1600" b="1"/>
+              <a:rPr lang="en-US" sz="2000" b="1" dirty="0"/>
               <a:t>Shape decides which measure to trust.</a:t>
             </a:r>
             <a:r>
-              <a:rPr lang="en-US" sz="1600"/>
+              <a:rPr lang="en-US" sz="2000" dirty="0"/>
               <a:t> Skew and outliers drag the mean but leave the median alone, which is why we did shape first.</a:t>
             </a:r>
           </a:p>
@@ -9775,7 +9619,7 @@
 </p:sld>
 </file>
 
-<file path=ppt/slides/slide26.xml><?xml version="1.0" encoding="utf-8"?>
+<file path=ppt/slides/slide25.xml><?xml version="1.0" encoding="utf-8"?>
 <p:sld xmlns:a="http://schemas.openxmlformats.org/drawingml/2006/main" xmlns:r="http://schemas.openxmlformats.org/officeDocument/2006/relationships" xmlns:p="http://schemas.openxmlformats.org/presentationml/2006/main">
   <p:cSld>
     <p:spTree>
@@ -10218,7 +10062,7 @@
 </p:sld>
 </file>
 
-<file path=ppt/slides/slide27.xml><?xml version="1.0" encoding="utf-8"?>
+<file path=ppt/slides/slide26.xml><?xml version="1.0" encoding="utf-8"?>
 <p:sld xmlns:a="http://schemas.openxmlformats.org/drawingml/2006/main" xmlns:r="http://schemas.openxmlformats.org/officeDocument/2006/relationships" xmlns:p="http://schemas.openxmlformats.org/presentationml/2006/main">
   <p:cSld>
     <p:spTree>
@@ -10369,7 +10213,7 @@
 </p:sld>
 </file>
 
-<file path=ppt/slides/slide28.xml><?xml version="1.0" encoding="utf-8"?>
+<file path=ppt/slides/slide27.xml><?xml version="1.0" encoding="utf-8"?>
 <p:sld xmlns:a="http://schemas.openxmlformats.org/drawingml/2006/main" xmlns:r="http://schemas.openxmlformats.org/officeDocument/2006/relationships" xmlns:p="http://schemas.openxmlformats.org/presentationml/2006/main">
   <p:cSld>
     <p:spTree>
@@ -10596,7 +10440,7 @@
 </p:sld>
 </file>
 
-<file path=ppt/slides/slide29.xml><?xml version="1.0" encoding="utf-8"?>
+<file path=ppt/slides/slide28.xml><?xml version="1.0" encoding="utf-8"?>
 <p:sld xmlns:a="http://schemas.openxmlformats.org/drawingml/2006/main" xmlns:r="http://schemas.openxmlformats.org/officeDocument/2006/relationships" xmlns:p="http://schemas.openxmlformats.org/presentationml/2006/main">
   <p:cSld>
     <p:spTree>
@@ -10744,820 +10588,7 @@
 </p:sld>
 </file>
 
-<file path=ppt/slides/slide3.xml><?xml version="1.0" encoding="utf-8"?>
-<p:sld xmlns:a="http://schemas.openxmlformats.org/drawingml/2006/main" xmlns:r="http://schemas.openxmlformats.org/officeDocument/2006/relationships" xmlns:p="http://schemas.openxmlformats.org/presentationml/2006/main">
-  <p:cSld>
-    <p:spTree>
-      <p:nvGrpSpPr>
-        <p:cNvPr id="1" name=""/>
-        <p:cNvGrpSpPr/>
-        <p:nvPr/>
-      </p:nvGrpSpPr>
-      <p:grpSpPr>
-        <a:xfrm>
-          <a:off x="0" y="0"/>
-          <a:ext cx="0" cy="0"/>
-          <a:chOff x="0" y="0"/>
-          <a:chExt cx="0" cy="0"/>
-        </a:xfrm>
-      </p:grpSpPr>
-      <p:sp>
-        <p:nvSpPr>
-          <p:cNvPr id="2" name="Title 1"/>
-          <p:cNvSpPr>
-            <a:spLocks noGrp="1"/>
-          </p:cNvSpPr>
-          <p:nvPr>
-            <p:ph type="title"/>
-          </p:nvPr>
-        </p:nvSpPr>
-        <p:spPr>
-          <a:xfrm>
-            <a:off x="838200" y="365126"/>
-            <a:ext cx="10515600" cy="519130"/>
-          </a:xfrm>
-        </p:spPr>
-        <p:txBody>
-          <a:bodyPr>
-            <a:normAutofit fontScale="90000"/>
-          </a:bodyPr>
-          <a:lstStyle/>
-          <a:p>
-            <a:r>
-              <a:rPr lang="en-US" dirty="0"/>
-              <a:t>Review</a:t>
-            </a:r>
-          </a:p>
-        </p:txBody>
-      </p:sp>
-      <p:sp>
-        <p:nvSpPr>
-          <p:cNvPr id="3" name="Question 1"/>
-          <p:cNvSpPr/>
-          <p:nvPr/>
-        </p:nvSpPr>
-        <p:spPr>
-          <a:xfrm>
-            <a:off x="838200" y="1075688"/>
-            <a:ext cx="10515600" cy="1230000"/>
-          </a:xfrm>
-          <a:prstGeom prst="roundRect">
-            <a:avLst>
-              <a:gd name="adj" fmla="val 4000"/>
-            </a:avLst>
-          </a:prstGeom>
-          <a:solidFill>
-            <a:srgbClr val="F2F6FC"/>
-          </a:solidFill>
-          <a:ln w="19050">
-            <a:solidFill>
-              <a:schemeClr val="accent1"/>
-            </a:solidFill>
-          </a:ln>
-        </p:spPr>
-        <p:txBody>
-          <a:bodyPr lIns="228600" tIns="182880" rIns="228600" bIns="91440" anchor="t">
-            <a:normAutofit/>
-          </a:bodyPr>
-          <a:lstStyle/>
-          <a:p>
-            <a:pPr marL="0" indent="0">
-              <a:buNone/>
-            </a:pPr>
-            <a:r>
-              <a:rPr lang="en-US" b="1">
-                <a:solidFill>
-                  <a:srgbClr val="4472C4"/>
-                </a:solidFill>
-              </a:rPr>
-              <a:t>1   </a:t>
-            </a:r>
-            <a:r>
-              <a:rPr lang="en-US" b="1"/>
-              <a:t>How do we bin a continuous variable?</a:t>
-            </a:r>
-            <a:endParaRPr lang="en-US" b="1" dirty="0"/>
-          </a:p>
-        </p:txBody>
-      </p:sp>
-      <p:sp>
-        <p:nvSpPr>
-          <p:cNvPr id="4" name="Answer 1"/>
-          <p:cNvSpPr txBox="1"/>
-          <p:nvPr/>
-        </p:nvSpPr>
-        <p:spPr>
-          <a:xfrm>
-            <a:off x="1066800" y="1655688"/>
-            <a:ext cx="10058400" cy="558560"/>
-          </a:xfrm>
-          <a:prstGeom prst="rect">
-            <a:avLst/>
-          </a:prstGeom>
-          <a:noFill/>
-        </p:spPr>
-        <p:txBody>
-          <a:bodyPr wrap="square" lIns="0" tIns="0" rIns="0" bIns="0">
-            <a:normAutofit/>
-          </a:bodyPr>
-          <a:lstStyle/>
-          <a:p>
-            <a:pPr marL="0" indent="0">
-              <a:buNone/>
-            </a:pPr>
-            <a:r>
-              <a:rPr lang="en-US">
-                <a:solidFill>
-                  <a:srgbClr val="C00000"/>
-                </a:solidFill>
-              </a:rPr>
-              <a:t>Divide the range into K non-overlapping intervals of equal width, then count how many fall in each.</a:t>
-            </a:r>
-            <a:endParaRPr lang="en-US" dirty="0">
-              <a:solidFill>
-                <a:srgbClr val="C00000"/>
-              </a:solidFill>
-            </a:endParaRPr>
-          </a:p>
-        </p:txBody>
-      </p:sp>
-      <p:sp>
-        <p:nvSpPr>
-          <p:cNvPr id="5" name="Question 2"/>
-          <p:cNvSpPr/>
-          <p:nvPr/>
-        </p:nvSpPr>
-        <p:spPr>
-          <a:xfrm>
-            <a:off x="838200" y="2385688"/>
-            <a:ext cx="10515600" cy="1230000"/>
-          </a:xfrm>
-          <a:prstGeom prst="roundRect">
-            <a:avLst>
-              <a:gd name="adj" fmla="val 4000"/>
-            </a:avLst>
-          </a:prstGeom>
-          <a:solidFill>
-            <a:srgbClr val="F2F6FC"/>
-          </a:solidFill>
-          <a:ln w="19050">
-            <a:solidFill>
-              <a:schemeClr val="accent1"/>
-            </a:solidFill>
-          </a:ln>
-        </p:spPr>
-        <p:txBody>
-          <a:bodyPr lIns="228600" tIns="182880" rIns="228600" bIns="91440" anchor="t">
-            <a:normAutofit/>
-          </a:bodyPr>
-          <a:lstStyle/>
-          <a:p>
-            <a:pPr marL="0" indent="0">
-              <a:buNone/>
-            </a:pPr>
-            <a:r>
-              <a:rPr lang="en-US" b="1">
-                <a:solidFill>
-                  <a:srgbClr val="4472C4"/>
-                </a:solidFill>
-              </a:rPr>
-              <a:t>2   </a:t>
-            </a:r>
-            <a:r>
-              <a:rPr lang="en-US" b="1"/>
-              <a:t>Which graphs do we use for a qualitative variable?</a:t>
-            </a:r>
-            <a:endParaRPr lang="en-US" b="1" dirty="0"/>
-          </a:p>
-        </p:txBody>
-      </p:sp>
-      <p:sp>
-        <p:nvSpPr>
-          <p:cNvPr id="6" name="Answer 2"/>
-          <p:cNvSpPr txBox="1"/>
-          <p:nvPr/>
-        </p:nvSpPr>
-        <p:spPr>
-          <a:xfrm>
-            <a:off x="1066800" y="2965688"/>
-            <a:ext cx="10058400" cy="558560"/>
-          </a:xfrm>
-          <a:prstGeom prst="rect">
-            <a:avLst/>
-          </a:prstGeom>
-          <a:noFill/>
-        </p:spPr>
-        <p:txBody>
-          <a:bodyPr wrap="square" lIns="0" tIns="0" rIns="0" bIns="0">
-            <a:normAutofit/>
-          </a:bodyPr>
-          <a:lstStyle/>
-          <a:p>
-            <a:pPr marL="0" indent="0">
-              <a:buNone/>
-            </a:pPr>
-            <a:r>
-              <a:rPr lang="en-US" sz="1600">
-                <a:solidFill>
-                  <a:srgbClr val="C00000"/>
-                </a:solidFill>
-              </a:rPr>
-              <a:t>Bar graphs, pie charts, and Pareto charts.</a:t>
-            </a:r>
-            <a:endParaRPr lang="en-US" sz="1600" dirty="0">
-              <a:solidFill>
-                <a:srgbClr val="C00000"/>
-              </a:solidFill>
-            </a:endParaRPr>
-          </a:p>
-        </p:txBody>
-      </p:sp>
-      <p:sp>
-        <p:nvSpPr>
-          <p:cNvPr id="7" name="Question 3"/>
-          <p:cNvSpPr/>
-          <p:nvPr/>
-        </p:nvSpPr>
-        <p:spPr>
-          <a:xfrm>
-            <a:off x="838200" y="3695688"/>
-            <a:ext cx="10515600" cy="1230000"/>
-          </a:xfrm>
-          <a:prstGeom prst="roundRect">
-            <a:avLst>
-              <a:gd name="adj" fmla="val 4000"/>
-            </a:avLst>
-          </a:prstGeom>
-          <a:solidFill>
-            <a:srgbClr val="F2F6FC"/>
-          </a:solidFill>
-          <a:ln w="19050">
-            <a:solidFill>
-              <a:schemeClr val="accent1"/>
-            </a:solidFill>
-          </a:ln>
-        </p:spPr>
-        <p:txBody>
-          <a:bodyPr lIns="228600" tIns="182880" rIns="228600" bIns="91440" anchor="t">
-            <a:normAutofit/>
-          </a:bodyPr>
-          <a:lstStyle/>
-          <a:p>
-            <a:pPr marL="0" indent="0">
-              <a:buNone/>
-            </a:pPr>
-            <a:r>
-              <a:rPr lang="en-US" b="1">
-                <a:solidFill>
-                  <a:srgbClr val="4472C4"/>
-                </a:solidFill>
-              </a:rPr>
-              <a:t>3   </a:t>
-            </a:r>
-            <a:r>
-              <a:rPr lang="en-US" b="1"/>
-              <a:t>Which graphs do we use for a quantitative variable?</a:t>
-            </a:r>
-            <a:endParaRPr lang="en-US" b="1" dirty="0"/>
-          </a:p>
-        </p:txBody>
-      </p:sp>
-      <p:sp>
-        <p:nvSpPr>
-          <p:cNvPr id="8" name="Answer 3"/>
-          <p:cNvSpPr txBox="1"/>
-          <p:nvPr/>
-        </p:nvSpPr>
-        <p:spPr>
-          <a:xfrm>
-            <a:off x="1066800" y="4275688"/>
-            <a:ext cx="10058400" cy="558560"/>
-          </a:xfrm>
-          <a:prstGeom prst="rect">
-            <a:avLst/>
-          </a:prstGeom>
-          <a:noFill/>
-        </p:spPr>
-        <p:txBody>
-          <a:bodyPr wrap="square" lIns="0" tIns="0" rIns="0" bIns="0">
-            <a:normAutofit/>
-          </a:bodyPr>
-          <a:lstStyle/>
-          <a:p>
-            <a:pPr marL="0" indent="0">
-              <a:buNone/>
-            </a:pPr>
-            <a:r>
-              <a:rPr lang="en-US" sz="1600">
-                <a:solidFill>
-                  <a:srgbClr val="C00000"/>
-                </a:solidFill>
-              </a:rPr>
-              <a:t>Dot plots, stem and leaf plots, and histograms – today's topic.</a:t>
-            </a:r>
-            <a:endParaRPr lang="en-US" sz="1600" dirty="0">
-              <a:solidFill>
-                <a:srgbClr val="C00000"/>
-              </a:solidFill>
-            </a:endParaRPr>
-          </a:p>
-        </p:txBody>
-      </p:sp>
-      <p:sp>
-        <p:nvSpPr>
-          <p:cNvPr id="9" name="Question 4"/>
-          <p:cNvSpPr/>
-          <p:nvPr/>
-        </p:nvSpPr>
-        <p:spPr>
-          <a:xfrm>
-            <a:off x="838200" y="5005688"/>
-            <a:ext cx="10515600" cy="1230000"/>
-          </a:xfrm>
-          <a:prstGeom prst="roundRect">
-            <a:avLst>
-              <a:gd name="adj" fmla="val 4000"/>
-            </a:avLst>
-          </a:prstGeom>
-          <a:solidFill>
-            <a:srgbClr val="F2F6FC"/>
-          </a:solidFill>
-          <a:ln w="19050">
-            <a:solidFill>
-              <a:schemeClr val="accent1"/>
-            </a:solidFill>
-          </a:ln>
-        </p:spPr>
-        <p:txBody>
-          <a:bodyPr lIns="228600" tIns="182880" rIns="228600" bIns="91440" anchor="t">
-            <a:normAutofit/>
-          </a:bodyPr>
-          <a:lstStyle/>
-          <a:p>
-            <a:pPr marL="0" indent="0">
-              <a:buNone/>
-            </a:pPr>
-            <a:r>
-              <a:rPr lang="en-US" b="1">
-                <a:solidFill>
-                  <a:srgbClr val="4472C4"/>
-                </a:solidFill>
-              </a:rPr>
-              <a:t>4   </a:t>
-            </a:r>
-            <a:r>
-              <a:rPr lang="en-US" b="1"/>
-              <a:t>Why graph the data when we already have the frequency table?</a:t>
-            </a:r>
-            <a:endParaRPr lang="en-US" b="1" dirty="0"/>
-          </a:p>
-        </p:txBody>
-      </p:sp>
-      <p:sp>
-        <p:nvSpPr>
-          <p:cNvPr id="10" name="Answer 4"/>
-          <p:cNvSpPr txBox="1"/>
-          <p:nvPr/>
-        </p:nvSpPr>
-        <p:spPr>
-          <a:xfrm>
-            <a:off x="1066800" y="5585688"/>
-            <a:ext cx="10058400" cy="558560"/>
-          </a:xfrm>
-          <a:prstGeom prst="rect">
-            <a:avLst/>
-          </a:prstGeom>
-          <a:noFill/>
-        </p:spPr>
-        <p:txBody>
-          <a:bodyPr wrap="square" lIns="0" tIns="0" rIns="0" bIns="0">
-            <a:normAutofit/>
-          </a:bodyPr>
-          <a:lstStyle/>
-          <a:p>
-            <a:pPr marL="0" indent="0">
-              <a:buNone/>
-            </a:pPr>
-            <a:r>
-              <a:rPr lang="en-US" sz="1600">
-                <a:solidFill>
-                  <a:srgbClr val="C00000"/>
-                </a:solidFill>
-              </a:rPr>
-              <a:t>The graph shows shape, center, and spread at a glance, along with any outliers.</a:t>
-            </a:r>
-            <a:endParaRPr lang="en-US" sz="1600" dirty="0">
-              <a:solidFill>
-                <a:srgbClr val="C00000"/>
-              </a:solidFill>
-            </a:endParaRPr>
-          </a:p>
-        </p:txBody>
-      </p:sp>
-    </p:spTree>
-    <p:extLst>
-      <p:ext uri="{BB962C8B-B14F-4D97-AF65-F5344CB8AC3E}">
-        <p14:creationId xmlns:p14="http://schemas.microsoft.com/office/powerpoint/2010/main" val="1517484012"/>
-      </p:ext>
-    </p:extLst>
-  </p:cSld>
-  <p:clrMapOvr>
-    <a:masterClrMapping/>
-  </p:clrMapOvr>
-  <p:timing>
-    <p:tnLst>
-      <p:par>
-        <p:cTn id="1" dur="indefinite" restart="never" nodeType="tmRoot">
-          <p:childTnLst>
-            <p:seq concurrent="1" nextAc="seek">
-              <p:cTn id="2" dur="indefinite" nodeType="mainSeq">
-                <p:childTnLst>
-                  <p:par>
-                    <p:cTn id="3" fill="hold">
-                      <p:stCondLst>
-                        <p:cond delay="indefinite"/>
-                      </p:stCondLst>
-                      <p:childTnLst>
-                        <p:par>
-                          <p:cTn id="4" fill="hold">
-                            <p:stCondLst>
-                              <p:cond delay="0"/>
-                            </p:stCondLst>
-                            <p:childTnLst>
-                              <p:par>
-                                <p:cTn id="5" presetID="1" presetClass="entr" presetSubtype="0" fill="hold" nodeType="clickEffect">
-                                  <p:stCondLst>
-                                    <p:cond delay="0"/>
-                                  </p:stCondLst>
-                                  <p:childTnLst>
-                                    <p:set>
-                                      <p:cBhvr>
-                                        <p:cTn id="6" dur="1" fill="hold">
-                                          <p:stCondLst>
-                                            <p:cond delay="0"/>
-                                          </p:stCondLst>
-                                        </p:cTn>
-                                        <p:tgtEl>
-                                          <p:spTgt spid="3"/>
-                                        </p:tgtEl>
-                                        <p:attrNameLst>
-                                          <p:attrName>style.visibility</p:attrName>
-                                        </p:attrNameLst>
-                                      </p:cBhvr>
-                                      <p:to>
-                                        <p:strVal val="visible"/>
-                                      </p:to>
-                                    </p:set>
-                                  </p:childTnLst>
-                                </p:cTn>
-                              </p:par>
-                            </p:childTnLst>
-                          </p:cTn>
-                        </p:par>
-                      </p:childTnLst>
-                    </p:cTn>
-                  </p:par>
-                  <p:par>
-                    <p:cTn id="7" fill="hold">
-                      <p:stCondLst>
-                        <p:cond delay="indefinite"/>
-                      </p:stCondLst>
-                      <p:childTnLst>
-                        <p:par>
-                          <p:cTn id="8" fill="hold">
-                            <p:stCondLst>
-                              <p:cond delay="0"/>
-                            </p:stCondLst>
-                            <p:childTnLst>
-                              <p:par>
-                                <p:cTn id="9" presetID="1" presetClass="entr" presetSubtype="0" fill="hold" nodeType="clickEffect">
-                                  <p:stCondLst>
-                                    <p:cond delay="0"/>
-                                  </p:stCondLst>
-                                  <p:childTnLst>
-                                    <p:set>
-                                      <p:cBhvr>
-                                        <p:cTn id="10" dur="1" fill="hold">
-                                          <p:stCondLst>
-                                            <p:cond delay="0"/>
-                                          </p:stCondLst>
-                                        </p:cTn>
-                                        <p:tgtEl>
-                                          <p:spTgt spid="4"/>
-                                        </p:tgtEl>
-                                        <p:attrNameLst>
-                                          <p:attrName>style.visibility</p:attrName>
-                                        </p:attrNameLst>
-                                      </p:cBhvr>
-                                      <p:to>
-                                        <p:strVal val="visible"/>
-                                      </p:to>
-                                    </p:set>
-                                  </p:childTnLst>
-                                </p:cTn>
-                              </p:par>
-                            </p:childTnLst>
-                          </p:cTn>
-                        </p:par>
-                      </p:childTnLst>
-                    </p:cTn>
-                  </p:par>
-                  <p:par>
-                    <p:cTn id="11" fill="hold">
-                      <p:stCondLst>
-                        <p:cond delay="indefinite"/>
-                      </p:stCondLst>
-                      <p:childTnLst>
-                        <p:par>
-                          <p:cTn id="12" fill="hold">
-                            <p:stCondLst>
-                              <p:cond delay="0"/>
-                            </p:stCondLst>
-                            <p:childTnLst>
-                              <p:par>
-                                <p:cTn id="13" presetID="1" presetClass="entr" presetSubtype="0" fill="hold" nodeType="clickEffect">
-                                  <p:stCondLst>
-                                    <p:cond delay="0"/>
-                                  </p:stCondLst>
-                                  <p:childTnLst>
-                                    <p:set>
-                                      <p:cBhvr>
-                                        <p:cTn id="14" dur="1" fill="hold">
-                                          <p:stCondLst>
-                                            <p:cond delay="0"/>
-                                          </p:stCondLst>
-                                        </p:cTn>
-                                        <p:tgtEl>
-                                          <p:spTgt spid="5"/>
-                                        </p:tgtEl>
-                                        <p:attrNameLst>
-                                          <p:attrName>style.visibility</p:attrName>
-                                        </p:attrNameLst>
-                                      </p:cBhvr>
-                                      <p:to>
-                                        <p:strVal val="visible"/>
-                                      </p:to>
-                                    </p:set>
-                                  </p:childTnLst>
-                                </p:cTn>
-                              </p:par>
-                            </p:childTnLst>
-                          </p:cTn>
-                        </p:par>
-                      </p:childTnLst>
-                    </p:cTn>
-                  </p:par>
-                  <p:par>
-                    <p:cTn id="15" fill="hold">
-                      <p:stCondLst>
-                        <p:cond delay="indefinite"/>
-                      </p:stCondLst>
-                      <p:childTnLst>
-                        <p:par>
-                          <p:cTn id="16" fill="hold">
-                            <p:stCondLst>
-                              <p:cond delay="0"/>
-                            </p:stCondLst>
-                            <p:childTnLst>
-                              <p:par>
-                                <p:cTn id="17" presetID="1" presetClass="entr" presetSubtype="0" fill="hold" nodeType="clickEffect">
-                                  <p:stCondLst>
-                                    <p:cond delay="0"/>
-                                  </p:stCondLst>
-                                  <p:childTnLst>
-                                    <p:set>
-                                      <p:cBhvr>
-                                        <p:cTn id="18" dur="1" fill="hold">
-                                          <p:stCondLst>
-                                            <p:cond delay="0"/>
-                                          </p:stCondLst>
-                                        </p:cTn>
-                                        <p:tgtEl>
-                                          <p:spTgt spid="6"/>
-                                        </p:tgtEl>
-                                        <p:attrNameLst>
-                                          <p:attrName>style.visibility</p:attrName>
-                                        </p:attrNameLst>
-                                      </p:cBhvr>
-                                      <p:to>
-                                        <p:strVal val="visible"/>
-                                      </p:to>
-                                    </p:set>
-                                  </p:childTnLst>
-                                </p:cTn>
-                              </p:par>
-                            </p:childTnLst>
-                          </p:cTn>
-                        </p:par>
-                      </p:childTnLst>
-                    </p:cTn>
-                  </p:par>
-                  <p:par>
-                    <p:cTn id="19" fill="hold">
-                      <p:stCondLst>
-                        <p:cond delay="indefinite"/>
-                      </p:stCondLst>
-                      <p:childTnLst>
-                        <p:par>
-                          <p:cTn id="20" fill="hold">
-                            <p:stCondLst>
-                              <p:cond delay="0"/>
-                            </p:stCondLst>
-                            <p:childTnLst>
-                              <p:par>
-                                <p:cTn id="21" presetID="1" presetClass="entr" presetSubtype="0" fill="hold" nodeType="clickEffect">
-                                  <p:stCondLst>
-                                    <p:cond delay="0"/>
-                                  </p:stCondLst>
-                                  <p:childTnLst>
-                                    <p:set>
-                                      <p:cBhvr>
-                                        <p:cTn id="22" dur="1" fill="hold">
-                                          <p:stCondLst>
-                                            <p:cond delay="0"/>
-                                          </p:stCondLst>
-                                        </p:cTn>
-                                        <p:tgtEl>
-                                          <p:spTgt spid="7"/>
-                                        </p:tgtEl>
-                                        <p:attrNameLst>
-                                          <p:attrName>style.visibility</p:attrName>
-                                        </p:attrNameLst>
-                                      </p:cBhvr>
-                                      <p:to>
-                                        <p:strVal val="visible"/>
-                                      </p:to>
-                                    </p:set>
-                                  </p:childTnLst>
-                                </p:cTn>
-                              </p:par>
-                            </p:childTnLst>
-                          </p:cTn>
-                        </p:par>
-                      </p:childTnLst>
-                    </p:cTn>
-                  </p:par>
-                  <p:par>
-                    <p:cTn id="23" fill="hold">
-                      <p:stCondLst>
-                        <p:cond delay="indefinite"/>
-                      </p:stCondLst>
-                      <p:childTnLst>
-                        <p:par>
-                          <p:cTn id="24" fill="hold">
-                            <p:stCondLst>
-                              <p:cond delay="0"/>
-                            </p:stCondLst>
-                            <p:childTnLst>
-                              <p:par>
-                                <p:cTn id="25" presetID="1" presetClass="entr" presetSubtype="0" fill="hold" nodeType="clickEffect">
-                                  <p:stCondLst>
-                                    <p:cond delay="0"/>
-                                  </p:stCondLst>
-                                  <p:childTnLst>
-                                    <p:set>
-                                      <p:cBhvr>
-                                        <p:cTn id="26" dur="1" fill="hold">
-                                          <p:stCondLst>
-                                            <p:cond delay="0"/>
-                                          </p:stCondLst>
-                                        </p:cTn>
-                                        <p:tgtEl>
-                                          <p:spTgt spid="8"/>
-                                        </p:tgtEl>
-                                        <p:attrNameLst>
-                                          <p:attrName>style.visibility</p:attrName>
-                                        </p:attrNameLst>
-                                      </p:cBhvr>
-                                      <p:to>
-                                        <p:strVal val="visible"/>
-                                      </p:to>
-                                    </p:set>
-                                  </p:childTnLst>
-                                </p:cTn>
-                              </p:par>
-                            </p:childTnLst>
-                          </p:cTn>
-                        </p:par>
-                      </p:childTnLst>
-                    </p:cTn>
-                  </p:par>
-                  <p:par>
-                    <p:cTn id="27" fill="hold">
-                      <p:stCondLst>
-                        <p:cond delay="indefinite"/>
-                      </p:stCondLst>
-                      <p:childTnLst>
-                        <p:par>
-                          <p:cTn id="28" fill="hold">
-                            <p:stCondLst>
-                              <p:cond delay="0"/>
-                            </p:stCondLst>
-                            <p:childTnLst>
-                              <p:par>
-                                <p:cTn id="29" presetID="1" presetClass="entr" presetSubtype="0" fill="hold" nodeType="clickEffect">
-                                  <p:stCondLst>
-                                    <p:cond delay="0"/>
-                                  </p:stCondLst>
-                                  <p:childTnLst>
-                                    <p:set>
-                                      <p:cBhvr>
-                                        <p:cTn id="30" dur="1" fill="hold">
-                                          <p:stCondLst>
-                                            <p:cond delay="0"/>
-                                          </p:stCondLst>
-                                        </p:cTn>
-                                        <p:tgtEl>
-                                          <p:spTgt spid="9"/>
-                                        </p:tgtEl>
-                                        <p:attrNameLst>
-                                          <p:attrName>style.visibility</p:attrName>
-                                        </p:attrNameLst>
-                                      </p:cBhvr>
-                                      <p:to>
-                                        <p:strVal val="visible"/>
-                                      </p:to>
-                                    </p:set>
-                                  </p:childTnLst>
-                                </p:cTn>
-                              </p:par>
-                            </p:childTnLst>
-                          </p:cTn>
-                        </p:par>
-                      </p:childTnLst>
-                    </p:cTn>
-                  </p:par>
-                  <p:par>
-                    <p:cTn id="31" fill="hold">
-                      <p:stCondLst>
-                        <p:cond delay="indefinite"/>
-                      </p:stCondLst>
-                      <p:childTnLst>
-                        <p:par>
-                          <p:cTn id="32" fill="hold">
-                            <p:stCondLst>
-                              <p:cond delay="0"/>
-                            </p:stCondLst>
-                            <p:childTnLst>
-                              <p:par>
-                                <p:cTn id="33" presetID="1" presetClass="entr" presetSubtype="0" fill="hold" nodeType="clickEffect">
-                                  <p:stCondLst>
-                                    <p:cond delay="0"/>
-                                  </p:stCondLst>
-                                  <p:childTnLst>
-                                    <p:set>
-                                      <p:cBhvr>
-                                        <p:cTn id="34" dur="1" fill="hold">
-                                          <p:stCondLst>
-                                            <p:cond delay="0"/>
-                                          </p:stCondLst>
-                                        </p:cTn>
-                                        <p:tgtEl>
-                                          <p:spTgt spid="10"/>
-                                        </p:tgtEl>
-                                        <p:attrNameLst>
-                                          <p:attrName>style.visibility</p:attrName>
-                                        </p:attrNameLst>
-                                      </p:cBhvr>
-                                      <p:to>
-                                        <p:strVal val="visible"/>
-                                      </p:to>
-                                    </p:set>
-                                  </p:childTnLst>
-                                </p:cTn>
-                              </p:par>
-                            </p:childTnLst>
-                          </p:cTn>
-                        </p:par>
-                      </p:childTnLst>
-                    </p:cTn>
-                  </p:par>
-                </p:childTnLst>
-              </p:cTn>
-              <p:prevCondLst>
-                <p:cond evt="onPrev" delay="0">
-                  <p:tgtEl>
-                    <p:sldTgt/>
-                  </p:tgtEl>
-                </p:cond>
-              </p:prevCondLst>
-              <p:nextCondLst>
-                <p:cond evt="onNext" delay="0">
-                  <p:tgtEl>
-                    <p:sldTgt/>
-                  </p:tgtEl>
-                </p:cond>
-              </p:nextCondLst>
-            </p:seq>
-          </p:childTnLst>
-        </p:cTn>
-      </p:par>
-    </p:tnLst>
-  </p:timing>
-</p:sld>
-</file>
-
-<file path=ppt/slides/slide30.xml><?xml version="1.0" encoding="utf-8"?>
+<file path=ppt/slides/slide29.xml><?xml version="1.0" encoding="utf-8"?>
 <p:sld xmlns:a="http://schemas.openxmlformats.org/drawingml/2006/main" xmlns:r="http://schemas.openxmlformats.org/officeDocument/2006/relationships" xmlns:p="http://schemas.openxmlformats.org/presentationml/2006/main">
   <p:cSld>
     <p:spTree>
@@ -12589,7 +11620,820 @@
 </p:sld>
 </file>
 
-<file path=ppt/slides/slide31.xml><?xml version="1.0" encoding="utf-8"?>
+<file path=ppt/slides/slide3.xml><?xml version="1.0" encoding="utf-8"?>
+<p:sld xmlns:a="http://schemas.openxmlformats.org/drawingml/2006/main" xmlns:r="http://schemas.openxmlformats.org/officeDocument/2006/relationships" xmlns:p="http://schemas.openxmlformats.org/presentationml/2006/main">
+  <p:cSld>
+    <p:spTree>
+      <p:nvGrpSpPr>
+        <p:cNvPr id="1" name=""/>
+        <p:cNvGrpSpPr/>
+        <p:nvPr/>
+      </p:nvGrpSpPr>
+      <p:grpSpPr>
+        <a:xfrm>
+          <a:off x="0" y="0"/>
+          <a:ext cx="0" cy="0"/>
+          <a:chOff x="0" y="0"/>
+          <a:chExt cx="0" cy="0"/>
+        </a:xfrm>
+      </p:grpSpPr>
+      <p:sp>
+        <p:nvSpPr>
+          <p:cNvPr id="2" name="Title 1"/>
+          <p:cNvSpPr>
+            <a:spLocks noGrp="1"/>
+          </p:cNvSpPr>
+          <p:nvPr>
+            <p:ph type="title"/>
+          </p:nvPr>
+        </p:nvSpPr>
+        <p:spPr>
+          <a:xfrm>
+            <a:off x="838200" y="365126"/>
+            <a:ext cx="10515600" cy="519130"/>
+          </a:xfrm>
+        </p:spPr>
+        <p:txBody>
+          <a:bodyPr>
+            <a:normAutofit fontScale="90000"/>
+          </a:bodyPr>
+          <a:lstStyle/>
+          <a:p>
+            <a:r>
+              <a:rPr lang="en-US" dirty="0"/>
+              <a:t>Review</a:t>
+            </a:r>
+          </a:p>
+        </p:txBody>
+      </p:sp>
+      <p:sp>
+        <p:nvSpPr>
+          <p:cNvPr id="3" name="Question 1"/>
+          <p:cNvSpPr/>
+          <p:nvPr/>
+        </p:nvSpPr>
+        <p:spPr>
+          <a:xfrm>
+            <a:off x="838200" y="1075688"/>
+            <a:ext cx="10515600" cy="1230000"/>
+          </a:xfrm>
+          <a:prstGeom prst="roundRect">
+            <a:avLst>
+              <a:gd name="adj" fmla="val 4000"/>
+            </a:avLst>
+          </a:prstGeom>
+          <a:solidFill>
+            <a:srgbClr val="F2F6FC"/>
+          </a:solidFill>
+          <a:ln w="19050">
+            <a:solidFill>
+              <a:schemeClr val="accent1"/>
+            </a:solidFill>
+          </a:ln>
+        </p:spPr>
+        <p:txBody>
+          <a:bodyPr lIns="228600" tIns="182880" rIns="228600" bIns="91440" anchor="t">
+            <a:normAutofit/>
+          </a:bodyPr>
+          <a:lstStyle/>
+          <a:p>
+            <a:pPr marL="0" indent="0">
+              <a:buNone/>
+            </a:pPr>
+            <a:r>
+              <a:rPr lang="en-US" b="1">
+                <a:solidFill>
+                  <a:srgbClr val="4472C4"/>
+                </a:solidFill>
+              </a:rPr>
+              <a:t>1   </a:t>
+            </a:r>
+            <a:r>
+              <a:rPr lang="en-US" b="1"/>
+              <a:t>How do we bin a continuous variable?</a:t>
+            </a:r>
+            <a:endParaRPr lang="en-US" b="1" dirty="0"/>
+          </a:p>
+        </p:txBody>
+      </p:sp>
+      <p:sp>
+        <p:nvSpPr>
+          <p:cNvPr id="4" name="Answer 1"/>
+          <p:cNvSpPr txBox="1"/>
+          <p:nvPr/>
+        </p:nvSpPr>
+        <p:spPr>
+          <a:xfrm>
+            <a:off x="1066800" y="1655688"/>
+            <a:ext cx="10058400" cy="558560"/>
+          </a:xfrm>
+          <a:prstGeom prst="rect">
+            <a:avLst/>
+          </a:prstGeom>
+          <a:noFill/>
+        </p:spPr>
+        <p:txBody>
+          <a:bodyPr wrap="square" lIns="0" tIns="0" rIns="0" bIns="0">
+            <a:normAutofit/>
+          </a:bodyPr>
+          <a:lstStyle/>
+          <a:p>
+            <a:pPr marL="0" indent="0">
+              <a:buNone/>
+            </a:pPr>
+            <a:r>
+              <a:rPr lang="en-US">
+                <a:solidFill>
+                  <a:srgbClr val="C00000"/>
+                </a:solidFill>
+              </a:rPr>
+              <a:t>Divide the range into K non-overlapping intervals of equal width, then count how many fall in each.</a:t>
+            </a:r>
+            <a:endParaRPr lang="en-US" dirty="0">
+              <a:solidFill>
+                <a:srgbClr val="C00000"/>
+              </a:solidFill>
+            </a:endParaRPr>
+          </a:p>
+        </p:txBody>
+      </p:sp>
+      <p:sp>
+        <p:nvSpPr>
+          <p:cNvPr id="5" name="Question 2"/>
+          <p:cNvSpPr/>
+          <p:nvPr/>
+        </p:nvSpPr>
+        <p:spPr>
+          <a:xfrm>
+            <a:off x="838200" y="2385688"/>
+            <a:ext cx="10515600" cy="1230000"/>
+          </a:xfrm>
+          <a:prstGeom prst="roundRect">
+            <a:avLst>
+              <a:gd name="adj" fmla="val 4000"/>
+            </a:avLst>
+          </a:prstGeom>
+          <a:solidFill>
+            <a:srgbClr val="F2F6FC"/>
+          </a:solidFill>
+          <a:ln w="19050">
+            <a:solidFill>
+              <a:schemeClr val="accent1"/>
+            </a:solidFill>
+          </a:ln>
+        </p:spPr>
+        <p:txBody>
+          <a:bodyPr lIns="228600" tIns="182880" rIns="228600" bIns="91440" anchor="t">
+            <a:normAutofit/>
+          </a:bodyPr>
+          <a:lstStyle/>
+          <a:p>
+            <a:pPr marL="0" indent="0">
+              <a:buNone/>
+            </a:pPr>
+            <a:r>
+              <a:rPr lang="en-US" b="1">
+                <a:solidFill>
+                  <a:srgbClr val="4472C4"/>
+                </a:solidFill>
+              </a:rPr>
+              <a:t>2   </a:t>
+            </a:r>
+            <a:r>
+              <a:rPr lang="en-US" b="1"/>
+              <a:t>Which graphs do we use for a qualitative variable?</a:t>
+            </a:r>
+            <a:endParaRPr lang="en-US" b="1" dirty="0"/>
+          </a:p>
+        </p:txBody>
+      </p:sp>
+      <p:sp>
+        <p:nvSpPr>
+          <p:cNvPr id="6" name="Answer 2"/>
+          <p:cNvSpPr txBox="1"/>
+          <p:nvPr/>
+        </p:nvSpPr>
+        <p:spPr>
+          <a:xfrm>
+            <a:off x="1066800" y="2965688"/>
+            <a:ext cx="10058400" cy="558560"/>
+          </a:xfrm>
+          <a:prstGeom prst="rect">
+            <a:avLst/>
+          </a:prstGeom>
+          <a:noFill/>
+        </p:spPr>
+        <p:txBody>
+          <a:bodyPr wrap="square" lIns="0" tIns="0" rIns="0" bIns="0">
+            <a:normAutofit/>
+          </a:bodyPr>
+          <a:lstStyle/>
+          <a:p>
+            <a:pPr marL="0" indent="0">
+              <a:buNone/>
+            </a:pPr>
+            <a:r>
+              <a:rPr lang="en-US" sz="1600">
+                <a:solidFill>
+                  <a:srgbClr val="C00000"/>
+                </a:solidFill>
+              </a:rPr>
+              <a:t>Bar graphs, pie charts, and Pareto charts.</a:t>
+            </a:r>
+            <a:endParaRPr lang="en-US" sz="1600" dirty="0">
+              <a:solidFill>
+                <a:srgbClr val="C00000"/>
+              </a:solidFill>
+            </a:endParaRPr>
+          </a:p>
+        </p:txBody>
+      </p:sp>
+      <p:sp>
+        <p:nvSpPr>
+          <p:cNvPr id="7" name="Question 3"/>
+          <p:cNvSpPr/>
+          <p:nvPr/>
+        </p:nvSpPr>
+        <p:spPr>
+          <a:xfrm>
+            <a:off x="838200" y="3695688"/>
+            <a:ext cx="10515600" cy="1230000"/>
+          </a:xfrm>
+          <a:prstGeom prst="roundRect">
+            <a:avLst>
+              <a:gd name="adj" fmla="val 4000"/>
+            </a:avLst>
+          </a:prstGeom>
+          <a:solidFill>
+            <a:srgbClr val="F2F6FC"/>
+          </a:solidFill>
+          <a:ln w="19050">
+            <a:solidFill>
+              <a:schemeClr val="accent1"/>
+            </a:solidFill>
+          </a:ln>
+        </p:spPr>
+        <p:txBody>
+          <a:bodyPr lIns="228600" tIns="182880" rIns="228600" bIns="91440" anchor="t">
+            <a:normAutofit/>
+          </a:bodyPr>
+          <a:lstStyle/>
+          <a:p>
+            <a:pPr marL="0" indent="0">
+              <a:buNone/>
+            </a:pPr>
+            <a:r>
+              <a:rPr lang="en-US" b="1">
+                <a:solidFill>
+                  <a:srgbClr val="4472C4"/>
+                </a:solidFill>
+              </a:rPr>
+              <a:t>3   </a:t>
+            </a:r>
+            <a:r>
+              <a:rPr lang="en-US" b="1"/>
+              <a:t>Which graphs do we use for a quantitative variable?</a:t>
+            </a:r>
+            <a:endParaRPr lang="en-US" b="1" dirty="0"/>
+          </a:p>
+        </p:txBody>
+      </p:sp>
+      <p:sp>
+        <p:nvSpPr>
+          <p:cNvPr id="8" name="Answer 3"/>
+          <p:cNvSpPr txBox="1"/>
+          <p:nvPr/>
+        </p:nvSpPr>
+        <p:spPr>
+          <a:xfrm>
+            <a:off x="1066800" y="4275688"/>
+            <a:ext cx="10058400" cy="558560"/>
+          </a:xfrm>
+          <a:prstGeom prst="rect">
+            <a:avLst/>
+          </a:prstGeom>
+          <a:noFill/>
+        </p:spPr>
+        <p:txBody>
+          <a:bodyPr wrap="square" lIns="0" tIns="0" rIns="0" bIns="0">
+            <a:normAutofit/>
+          </a:bodyPr>
+          <a:lstStyle/>
+          <a:p>
+            <a:pPr marL="0" indent="0">
+              <a:buNone/>
+            </a:pPr>
+            <a:r>
+              <a:rPr lang="en-US" sz="1600">
+                <a:solidFill>
+                  <a:srgbClr val="C00000"/>
+                </a:solidFill>
+              </a:rPr>
+              <a:t>Dot plots, stem and leaf plots, and histograms – today's topic.</a:t>
+            </a:r>
+            <a:endParaRPr lang="en-US" sz="1600" dirty="0">
+              <a:solidFill>
+                <a:srgbClr val="C00000"/>
+              </a:solidFill>
+            </a:endParaRPr>
+          </a:p>
+        </p:txBody>
+      </p:sp>
+      <p:sp>
+        <p:nvSpPr>
+          <p:cNvPr id="9" name="Question 4"/>
+          <p:cNvSpPr/>
+          <p:nvPr/>
+        </p:nvSpPr>
+        <p:spPr>
+          <a:xfrm>
+            <a:off x="838200" y="5005688"/>
+            <a:ext cx="10515600" cy="1230000"/>
+          </a:xfrm>
+          <a:prstGeom prst="roundRect">
+            <a:avLst>
+              <a:gd name="adj" fmla="val 4000"/>
+            </a:avLst>
+          </a:prstGeom>
+          <a:solidFill>
+            <a:srgbClr val="F2F6FC"/>
+          </a:solidFill>
+          <a:ln w="19050">
+            <a:solidFill>
+              <a:schemeClr val="accent1"/>
+            </a:solidFill>
+          </a:ln>
+        </p:spPr>
+        <p:txBody>
+          <a:bodyPr lIns="228600" tIns="182880" rIns="228600" bIns="91440" anchor="t">
+            <a:normAutofit/>
+          </a:bodyPr>
+          <a:lstStyle/>
+          <a:p>
+            <a:pPr marL="0" indent="0">
+              <a:buNone/>
+            </a:pPr>
+            <a:r>
+              <a:rPr lang="en-US" b="1">
+                <a:solidFill>
+                  <a:srgbClr val="4472C4"/>
+                </a:solidFill>
+              </a:rPr>
+              <a:t>4   </a:t>
+            </a:r>
+            <a:r>
+              <a:rPr lang="en-US" b="1"/>
+              <a:t>Why graph the data when we already have the frequency table?</a:t>
+            </a:r>
+            <a:endParaRPr lang="en-US" b="1" dirty="0"/>
+          </a:p>
+        </p:txBody>
+      </p:sp>
+      <p:sp>
+        <p:nvSpPr>
+          <p:cNvPr id="10" name="Answer 4"/>
+          <p:cNvSpPr txBox="1"/>
+          <p:nvPr/>
+        </p:nvSpPr>
+        <p:spPr>
+          <a:xfrm>
+            <a:off x="1066800" y="5585688"/>
+            <a:ext cx="10058400" cy="558560"/>
+          </a:xfrm>
+          <a:prstGeom prst="rect">
+            <a:avLst/>
+          </a:prstGeom>
+          <a:noFill/>
+        </p:spPr>
+        <p:txBody>
+          <a:bodyPr wrap="square" lIns="0" tIns="0" rIns="0" bIns="0">
+            <a:normAutofit/>
+          </a:bodyPr>
+          <a:lstStyle/>
+          <a:p>
+            <a:pPr marL="0" indent="0">
+              <a:buNone/>
+            </a:pPr>
+            <a:r>
+              <a:rPr lang="en-US" sz="1600">
+                <a:solidFill>
+                  <a:srgbClr val="C00000"/>
+                </a:solidFill>
+              </a:rPr>
+              <a:t>The graph shows shape, center, and spread at a glance, along with any outliers.</a:t>
+            </a:r>
+            <a:endParaRPr lang="en-US" sz="1600" dirty="0">
+              <a:solidFill>
+                <a:srgbClr val="C00000"/>
+              </a:solidFill>
+            </a:endParaRPr>
+          </a:p>
+        </p:txBody>
+      </p:sp>
+    </p:spTree>
+    <p:extLst>
+      <p:ext uri="{BB962C8B-B14F-4D97-AF65-F5344CB8AC3E}">
+        <p14:creationId xmlns:p14="http://schemas.microsoft.com/office/powerpoint/2010/main" val="1517484012"/>
+      </p:ext>
+    </p:extLst>
+  </p:cSld>
+  <p:clrMapOvr>
+    <a:masterClrMapping/>
+  </p:clrMapOvr>
+  <p:timing>
+    <p:tnLst>
+      <p:par>
+        <p:cTn id="1" dur="indefinite" restart="never" nodeType="tmRoot">
+          <p:childTnLst>
+            <p:seq concurrent="1" nextAc="seek">
+              <p:cTn id="2" dur="indefinite" nodeType="mainSeq">
+                <p:childTnLst>
+                  <p:par>
+                    <p:cTn id="3" fill="hold">
+                      <p:stCondLst>
+                        <p:cond delay="indefinite"/>
+                      </p:stCondLst>
+                      <p:childTnLst>
+                        <p:par>
+                          <p:cTn id="4" fill="hold">
+                            <p:stCondLst>
+                              <p:cond delay="0"/>
+                            </p:stCondLst>
+                            <p:childTnLst>
+                              <p:par>
+                                <p:cTn id="5" presetID="1" presetClass="entr" presetSubtype="0" fill="hold" nodeType="clickEffect">
+                                  <p:stCondLst>
+                                    <p:cond delay="0"/>
+                                  </p:stCondLst>
+                                  <p:childTnLst>
+                                    <p:set>
+                                      <p:cBhvr>
+                                        <p:cTn id="6" dur="1" fill="hold">
+                                          <p:stCondLst>
+                                            <p:cond delay="0"/>
+                                          </p:stCondLst>
+                                        </p:cTn>
+                                        <p:tgtEl>
+                                          <p:spTgt spid="3"/>
+                                        </p:tgtEl>
+                                        <p:attrNameLst>
+                                          <p:attrName>style.visibility</p:attrName>
+                                        </p:attrNameLst>
+                                      </p:cBhvr>
+                                      <p:to>
+                                        <p:strVal val="visible"/>
+                                      </p:to>
+                                    </p:set>
+                                  </p:childTnLst>
+                                </p:cTn>
+                              </p:par>
+                            </p:childTnLst>
+                          </p:cTn>
+                        </p:par>
+                      </p:childTnLst>
+                    </p:cTn>
+                  </p:par>
+                  <p:par>
+                    <p:cTn id="7" fill="hold">
+                      <p:stCondLst>
+                        <p:cond delay="indefinite"/>
+                      </p:stCondLst>
+                      <p:childTnLst>
+                        <p:par>
+                          <p:cTn id="8" fill="hold">
+                            <p:stCondLst>
+                              <p:cond delay="0"/>
+                            </p:stCondLst>
+                            <p:childTnLst>
+                              <p:par>
+                                <p:cTn id="9" presetID="1" presetClass="entr" presetSubtype="0" fill="hold" nodeType="clickEffect">
+                                  <p:stCondLst>
+                                    <p:cond delay="0"/>
+                                  </p:stCondLst>
+                                  <p:childTnLst>
+                                    <p:set>
+                                      <p:cBhvr>
+                                        <p:cTn id="10" dur="1" fill="hold">
+                                          <p:stCondLst>
+                                            <p:cond delay="0"/>
+                                          </p:stCondLst>
+                                        </p:cTn>
+                                        <p:tgtEl>
+                                          <p:spTgt spid="4"/>
+                                        </p:tgtEl>
+                                        <p:attrNameLst>
+                                          <p:attrName>style.visibility</p:attrName>
+                                        </p:attrNameLst>
+                                      </p:cBhvr>
+                                      <p:to>
+                                        <p:strVal val="visible"/>
+                                      </p:to>
+                                    </p:set>
+                                  </p:childTnLst>
+                                </p:cTn>
+                              </p:par>
+                            </p:childTnLst>
+                          </p:cTn>
+                        </p:par>
+                      </p:childTnLst>
+                    </p:cTn>
+                  </p:par>
+                  <p:par>
+                    <p:cTn id="11" fill="hold">
+                      <p:stCondLst>
+                        <p:cond delay="indefinite"/>
+                      </p:stCondLst>
+                      <p:childTnLst>
+                        <p:par>
+                          <p:cTn id="12" fill="hold">
+                            <p:stCondLst>
+                              <p:cond delay="0"/>
+                            </p:stCondLst>
+                            <p:childTnLst>
+                              <p:par>
+                                <p:cTn id="13" presetID="1" presetClass="entr" presetSubtype="0" fill="hold" nodeType="clickEffect">
+                                  <p:stCondLst>
+                                    <p:cond delay="0"/>
+                                  </p:stCondLst>
+                                  <p:childTnLst>
+                                    <p:set>
+                                      <p:cBhvr>
+                                        <p:cTn id="14" dur="1" fill="hold">
+                                          <p:stCondLst>
+                                            <p:cond delay="0"/>
+                                          </p:stCondLst>
+                                        </p:cTn>
+                                        <p:tgtEl>
+                                          <p:spTgt spid="5"/>
+                                        </p:tgtEl>
+                                        <p:attrNameLst>
+                                          <p:attrName>style.visibility</p:attrName>
+                                        </p:attrNameLst>
+                                      </p:cBhvr>
+                                      <p:to>
+                                        <p:strVal val="visible"/>
+                                      </p:to>
+                                    </p:set>
+                                  </p:childTnLst>
+                                </p:cTn>
+                              </p:par>
+                            </p:childTnLst>
+                          </p:cTn>
+                        </p:par>
+                      </p:childTnLst>
+                    </p:cTn>
+                  </p:par>
+                  <p:par>
+                    <p:cTn id="15" fill="hold">
+                      <p:stCondLst>
+                        <p:cond delay="indefinite"/>
+                      </p:stCondLst>
+                      <p:childTnLst>
+                        <p:par>
+                          <p:cTn id="16" fill="hold">
+                            <p:stCondLst>
+                              <p:cond delay="0"/>
+                            </p:stCondLst>
+                            <p:childTnLst>
+                              <p:par>
+                                <p:cTn id="17" presetID="1" presetClass="entr" presetSubtype="0" fill="hold" nodeType="clickEffect">
+                                  <p:stCondLst>
+                                    <p:cond delay="0"/>
+                                  </p:stCondLst>
+                                  <p:childTnLst>
+                                    <p:set>
+                                      <p:cBhvr>
+                                        <p:cTn id="18" dur="1" fill="hold">
+                                          <p:stCondLst>
+                                            <p:cond delay="0"/>
+                                          </p:stCondLst>
+                                        </p:cTn>
+                                        <p:tgtEl>
+                                          <p:spTgt spid="6"/>
+                                        </p:tgtEl>
+                                        <p:attrNameLst>
+                                          <p:attrName>style.visibility</p:attrName>
+                                        </p:attrNameLst>
+                                      </p:cBhvr>
+                                      <p:to>
+                                        <p:strVal val="visible"/>
+                                      </p:to>
+                                    </p:set>
+                                  </p:childTnLst>
+                                </p:cTn>
+                              </p:par>
+                            </p:childTnLst>
+                          </p:cTn>
+                        </p:par>
+                      </p:childTnLst>
+                    </p:cTn>
+                  </p:par>
+                  <p:par>
+                    <p:cTn id="19" fill="hold">
+                      <p:stCondLst>
+                        <p:cond delay="indefinite"/>
+                      </p:stCondLst>
+                      <p:childTnLst>
+                        <p:par>
+                          <p:cTn id="20" fill="hold">
+                            <p:stCondLst>
+                              <p:cond delay="0"/>
+                            </p:stCondLst>
+                            <p:childTnLst>
+                              <p:par>
+                                <p:cTn id="21" presetID="1" presetClass="entr" presetSubtype="0" fill="hold" nodeType="clickEffect">
+                                  <p:stCondLst>
+                                    <p:cond delay="0"/>
+                                  </p:stCondLst>
+                                  <p:childTnLst>
+                                    <p:set>
+                                      <p:cBhvr>
+                                        <p:cTn id="22" dur="1" fill="hold">
+                                          <p:stCondLst>
+                                            <p:cond delay="0"/>
+                                          </p:stCondLst>
+                                        </p:cTn>
+                                        <p:tgtEl>
+                                          <p:spTgt spid="7"/>
+                                        </p:tgtEl>
+                                        <p:attrNameLst>
+                                          <p:attrName>style.visibility</p:attrName>
+                                        </p:attrNameLst>
+                                      </p:cBhvr>
+                                      <p:to>
+                                        <p:strVal val="visible"/>
+                                      </p:to>
+                                    </p:set>
+                                  </p:childTnLst>
+                                </p:cTn>
+                              </p:par>
+                            </p:childTnLst>
+                          </p:cTn>
+                        </p:par>
+                      </p:childTnLst>
+                    </p:cTn>
+                  </p:par>
+                  <p:par>
+                    <p:cTn id="23" fill="hold">
+                      <p:stCondLst>
+                        <p:cond delay="indefinite"/>
+                      </p:stCondLst>
+                      <p:childTnLst>
+                        <p:par>
+                          <p:cTn id="24" fill="hold">
+                            <p:stCondLst>
+                              <p:cond delay="0"/>
+                            </p:stCondLst>
+                            <p:childTnLst>
+                              <p:par>
+                                <p:cTn id="25" presetID="1" presetClass="entr" presetSubtype="0" fill="hold" nodeType="clickEffect">
+                                  <p:stCondLst>
+                                    <p:cond delay="0"/>
+                                  </p:stCondLst>
+                                  <p:childTnLst>
+                                    <p:set>
+                                      <p:cBhvr>
+                                        <p:cTn id="26" dur="1" fill="hold">
+                                          <p:stCondLst>
+                                            <p:cond delay="0"/>
+                                          </p:stCondLst>
+                                        </p:cTn>
+                                        <p:tgtEl>
+                                          <p:spTgt spid="8"/>
+                                        </p:tgtEl>
+                                        <p:attrNameLst>
+                                          <p:attrName>style.visibility</p:attrName>
+                                        </p:attrNameLst>
+                                      </p:cBhvr>
+                                      <p:to>
+                                        <p:strVal val="visible"/>
+                                      </p:to>
+                                    </p:set>
+                                  </p:childTnLst>
+                                </p:cTn>
+                              </p:par>
+                            </p:childTnLst>
+                          </p:cTn>
+                        </p:par>
+                      </p:childTnLst>
+                    </p:cTn>
+                  </p:par>
+                  <p:par>
+                    <p:cTn id="27" fill="hold">
+                      <p:stCondLst>
+                        <p:cond delay="indefinite"/>
+                      </p:stCondLst>
+                      <p:childTnLst>
+                        <p:par>
+                          <p:cTn id="28" fill="hold">
+                            <p:stCondLst>
+                              <p:cond delay="0"/>
+                            </p:stCondLst>
+                            <p:childTnLst>
+                              <p:par>
+                                <p:cTn id="29" presetID="1" presetClass="entr" presetSubtype="0" fill="hold" nodeType="clickEffect">
+                                  <p:stCondLst>
+                                    <p:cond delay="0"/>
+                                  </p:stCondLst>
+                                  <p:childTnLst>
+                                    <p:set>
+                                      <p:cBhvr>
+                                        <p:cTn id="30" dur="1" fill="hold">
+                                          <p:stCondLst>
+                                            <p:cond delay="0"/>
+                                          </p:stCondLst>
+                                        </p:cTn>
+                                        <p:tgtEl>
+                                          <p:spTgt spid="9"/>
+                                        </p:tgtEl>
+                                        <p:attrNameLst>
+                                          <p:attrName>style.visibility</p:attrName>
+                                        </p:attrNameLst>
+                                      </p:cBhvr>
+                                      <p:to>
+                                        <p:strVal val="visible"/>
+                                      </p:to>
+                                    </p:set>
+                                  </p:childTnLst>
+                                </p:cTn>
+                              </p:par>
+                            </p:childTnLst>
+                          </p:cTn>
+                        </p:par>
+                      </p:childTnLst>
+                    </p:cTn>
+                  </p:par>
+                  <p:par>
+                    <p:cTn id="31" fill="hold">
+                      <p:stCondLst>
+                        <p:cond delay="indefinite"/>
+                      </p:stCondLst>
+                      <p:childTnLst>
+                        <p:par>
+                          <p:cTn id="32" fill="hold">
+                            <p:stCondLst>
+                              <p:cond delay="0"/>
+                            </p:stCondLst>
+                            <p:childTnLst>
+                              <p:par>
+                                <p:cTn id="33" presetID="1" presetClass="entr" presetSubtype="0" fill="hold" nodeType="clickEffect">
+                                  <p:stCondLst>
+                                    <p:cond delay="0"/>
+                                  </p:stCondLst>
+                                  <p:childTnLst>
+                                    <p:set>
+                                      <p:cBhvr>
+                                        <p:cTn id="34" dur="1" fill="hold">
+                                          <p:stCondLst>
+                                            <p:cond delay="0"/>
+                                          </p:stCondLst>
+                                        </p:cTn>
+                                        <p:tgtEl>
+                                          <p:spTgt spid="10"/>
+                                        </p:tgtEl>
+                                        <p:attrNameLst>
+                                          <p:attrName>style.visibility</p:attrName>
+                                        </p:attrNameLst>
+                                      </p:cBhvr>
+                                      <p:to>
+                                        <p:strVal val="visible"/>
+                                      </p:to>
+                                    </p:set>
+                                  </p:childTnLst>
+                                </p:cTn>
+                              </p:par>
+                            </p:childTnLst>
+                          </p:cTn>
+                        </p:par>
+                      </p:childTnLst>
+                    </p:cTn>
+                  </p:par>
+                </p:childTnLst>
+              </p:cTn>
+              <p:prevCondLst>
+                <p:cond evt="onPrev" delay="0">
+                  <p:tgtEl>
+                    <p:sldTgt/>
+                  </p:tgtEl>
+                </p:cond>
+              </p:prevCondLst>
+              <p:nextCondLst>
+                <p:cond evt="onNext" delay="0">
+                  <p:tgtEl>
+                    <p:sldTgt/>
+                  </p:tgtEl>
+                </p:cond>
+              </p:nextCondLst>
+            </p:seq>
+          </p:childTnLst>
+        </p:cTn>
+      </p:par>
+    </p:tnLst>
+  </p:timing>
+</p:sld>
+</file>
+
+<file path=ppt/slides/slide30.xml><?xml version="1.0" encoding="utf-8"?>
 <p:sld xmlns:a="http://schemas.openxmlformats.org/drawingml/2006/main" xmlns:r="http://schemas.openxmlformats.org/officeDocument/2006/relationships" xmlns:p="http://schemas.openxmlformats.org/presentationml/2006/main">
   <p:cSld>
     <p:spTree>
@@ -12731,7 +12575,7 @@
 </p:sld>
 </file>
 
-<file path=ppt/slides/slide32.xml><?xml version="1.0" encoding="utf-8"?>
+<file path=ppt/slides/slide31.xml><?xml version="1.0" encoding="utf-8"?>
 <p:sld xmlns:a="http://schemas.openxmlformats.org/drawingml/2006/main" xmlns:r="http://schemas.openxmlformats.org/officeDocument/2006/relationships" xmlns:p="http://schemas.openxmlformats.org/presentationml/2006/main">
   <p:cSld>
     <p:spTree>
@@ -12791,7 +12635,7 @@
 </p:sld>
 </file>
 
-<file path=ppt/slides/slide33.xml><?xml version="1.0" encoding="utf-8"?>
+<file path=ppt/slides/slide32.xml><?xml version="1.0" encoding="utf-8"?>
 <p:sld xmlns:a="http://schemas.openxmlformats.org/drawingml/2006/main" xmlns:r="http://schemas.openxmlformats.org/officeDocument/2006/relationships" xmlns:p="http://schemas.openxmlformats.org/presentationml/2006/main">
   <p:cSld>
     <p:spTree>
@@ -13199,7 +13043,7 @@
 </p:sld>
 </file>
 
-<file path=ppt/slides/slide34.xml><?xml version="1.0" encoding="utf-8"?>
+<file path=ppt/slides/slide33.xml><?xml version="1.0" encoding="utf-8"?>
 <p:sld xmlns:a="http://schemas.openxmlformats.org/drawingml/2006/main" xmlns:r="http://schemas.openxmlformats.org/officeDocument/2006/relationships" xmlns:p="http://schemas.openxmlformats.org/presentationml/2006/main">
   <p:cSld>
     <p:spTree>
@@ -13768,7 +13612,7 @@
 </p:sld>
 </file>
 
-<file path=ppt/slides/slide35.xml><?xml version="1.0" encoding="utf-8"?>
+<file path=ppt/slides/slide34.xml><?xml version="1.0" encoding="utf-8"?>
 <p:sld xmlns:a="http://schemas.openxmlformats.org/drawingml/2006/main" xmlns:r="http://schemas.openxmlformats.org/officeDocument/2006/relationships" xmlns:p="http://schemas.openxmlformats.org/presentationml/2006/main">
   <p:cSld>
     <p:spTree>
@@ -14683,7 +14527,7 @@
 </p:sld>
 </file>
 
-<file path=ppt/slides/slide36.xml><?xml version="1.0" encoding="utf-8"?>
+<file path=ppt/slides/slide35.xml><?xml version="1.0" encoding="utf-8"?>
 <p:sld xmlns:a="http://schemas.openxmlformats.org/drawingml/2006/main" xmlns:r="http://schemas.openxmlformats.org/officeDocument/2006/relationships" xmlns:p="http://schemas.openxmlformats.org/presentationml/2006/main">
   <p:cSld>
     <p:spTree>
